--- a/Slides-Day5.pptx
+++ b/Slides-Day5.pptx
@@ -259,7 +259,7 @@
           <a:p>
             <a:fld id="{CD989C08-BA69-4AD3-98E9-D53C63F6E1B1}" type="datetimeFigureOut">
               <a:rPr lang="en-US" smtClean="0"/>
-              <a:t>3/19/2025</a:t>
+              <a:t>4/5/2025</a:t>
             </a:fld>
             <a:endParaRPr lang="en-US"/>
           </a:p>
@@ -457,7 +457,7 @@
           <a:p>
             <a:fld id="{CD989C08-BA69-4AD3-98E9-D53C63F6E1B1}" type="datetimeFigureOut">
               <a:rPr lang="en-US" smtClean="0"/>
-              <a:t>3/19/2025</a:t>
+              <a:t>4/5/2025</a:t>
             </a:fld>
             <a:endParaRPr lang="en-US"/>
           </a:p>
@@ -665,7 +665,7 @@
           <a:p>
             <a:fld id="{CD989C08-BA69-4AD3-98E9-D53C63F6E1B1}" type="datetimeFigureOut">
               <a:rPr lang="en-US" smtClean="0"/>
-              <a:t>3/19/2025</a:t>
+              <a:t>4/5/2025</a:t>
             </a:fld>
             <a:endParaRPr lang="en-US"/>
           </a:p>
@@ -863,7 +863,7 @@
           <a:p>
             <a:fld id="{CD989C08-BA69-4AD3-98E9-D53C63F6E1B1}" type="datetimeFigureOut">
               <a:rPr lang="en-US" smtClean="0"/>
-              <a:t>3/19/2025</a:t>
+              <a:t>4/5/2025</a:t>
             </a:fld>
             <a:endParaRPr lang="en-US"/>
           </a:p>
@@ -1138,7 +1138,7 @@
           <a:p>
             <a:fld id="{CD989C08-BA69-4AD3-98E9-D53C63F6E1B1}" type="datetimeFigureOut">
               <a:rPr lang="en-US" smtClean="0"/>
-              <a:t>3/19/2025</a:t>
+              <a:t>4/5/2025</a:t>
             </a:fld>
             <a:endParaRPr lang="en-US"/>
           </a:p>
@@ -1403,7 +1403,7 @@
           <a:p>
             <a:fld id="{CD989C08-BA69-4AD3-98E9-D53C63F6E1B1}" type="datetimeFigureOut">
               <a:rPr lang="en-US" smtClean="0"/>
-              <a:t>3/19/2025</a:t>
+              <a:t>4/5/2025</a:t>
             </a:fld>
             <a:endParaRPr lang="en-US"/>
           </a:p>
@@ -1815,7 +1815,7 @@
           <a:p>
             <a:fld id="{CD989C08-BA69-4AD3-98E9-D53C63F6E1B1}" type="datetimeFigureOut">
               <a:rPr lang="en-US" smtClean="0"/>
-              <a:t>3/19/2025</a:t>
+              <a:t>4/5/2025</a:t>
             </a:fld>
             <a:endParaRPr lang="en-US"/>
           </a:p>
@@ -1956,7 +1956,7 @@
           <a:p>
             <a:fld id="{CD989C08-BA69-4AD3-98E9-D53C63F6E1B1}" type="datetimeFigureOut">
               <a:rPr lang="en-US" smtClean="0"/>
-              <a:t>3/19/2025</a:t>
+              <a:t>4/5/2025</a:t>
             </a:fld>
             <a:endParaRPr lang="en-US"/>
           </a:p>
@@ -2069,7 +2069,7 @@
           <a:p>
             <a:fld id="{CD989C08-BA69-4AD3-98E9-D53C63F6E1B1}" type="datetimeFigureOut">
               <a:rPr lang="en-US" smtClean="0"/>
-              <a:t>3/19/2025</a:t>
+              <a:t>4/5/2025</a:t>
             </a:fld>
             <a:endParaRPr lang="en-US"/>
           </a:p>
@@ -2380,7 +2380,7 @@
           <a:p>
             <a:fld id="{CD989C08-BA69-4AD3-98E9-D53C63F6E1B1}" type="datetimeFigureOut">
               <a:rPr lang="en-US" smtClean="0"/>
-              <a:t>3/19/2025</a:t>
+              <a:t>4/5/2025</a:t>
             </a:fld>
             <a:endParaRPr lang="en-US"/>
           </a:p>
@@ -2668,7 +2668,7 @@
           <a:p>
             <a:fld id="{CD989C08-BA69-4AD3-98E9-D53C63F6E1B1}" type="datetimeFigureOut">
               <a:rPr lang="en-US" smtClean="0"/>
-              <a:t>3/19/2025</a:t>
+              <a:t>4/5/2025</a:t>
             </a:fld>
             <a:endParaRPr lang="en-US"/>
           </a:p>
@@ -2909,7 +2909,7 @@
           <a:p>
             <a:fld id="{CD989C08-BA69-4AD3-98E9-D53C63F6E1B1}" type="datetimeFigureOut">
               <a:rPr lang="en-US" smtClean="0"/>
-              <a:t>3/19/2025</a:t>
+              <a:t>4/5/2025</a:t>
             </a:fld>
             <a:endParaRPr lang="en-US"/>
           </a:p>
@@ -3394,7 +3394,7 @@
                 <a:latin typeface="Arial" panose="020B0604020202020204" pitchFamily="34" charset="0"/>
                 <a:cs typeface="Arial" panose="020B0604020202020204" pitchFamily="34" charset="0"/>
               </a:rPr>
-              <a:t>Day 5: Secure Software Practices</a:t>
+              <a:t>Day 5: Secure Software Processes</a:t>
             </a:r>
             <a:endParaRPr lang="en-US" sz="3600" dirty="0">
               <a:solidFill>
@@ -3450,7 +3450,7 @@
                 <a:latin typeface="Arial" panose="020B0604020202020204" pitchFamily="34" charset="0"/>
                 <a:cs typeface="Arial" panose="020B0604020202020204" pitchFamily="34" charset="0"/>
               </a:rPr>
-              <a:t>Secure Software Practices</a:t>
+              <a:t>Threat modeling</a:t>
             </a:r>
           </a:p>
           <a:p>
@@ -3468,7 +3468,7 @@
                 <a:latin typeface="Arial" panose="020B0604020202020204" pitchFamily="34" charset="0"/>
                 <a:cs typeface="Arial" panose="020B0604020202020204" pitchFamily="34" charset="0"/>
               </a:rPr>
-              <a:t>Threat modeling and secure workflows</a:t>
+              <a:t>Secure workflows</a:t>
             </a:r>
           </a:p>
           <a:p>
